--- a/curso/pptx/S45.pptx
+++ b/curso/pptx/S45.pptx
@@ -6997,7 +6997,7 @@
                 </a:solidFill>
                 <a:latin typeface="Nunito Sans"/>
               </a:rPr>
-              <a:t>Halo:</a:t>
+              <a:t>光环：</a:t>
             </a:r>
             <a:r>
               <a:rPr sz="2800" b="0">
@@ -7006,7 +7006,7 @@
                 </a:solidFill>
                 <a:latin typeface="Nunito Sans"/>
               </a:rPr>
-              <a:t> el círculo de luz de los santos en los cuadros</a:t>
+              <a:t>画里圣人头上的那圈光</a:t>
             </a:r>
           </a:p>
           <a:p>
@@ -7031,7 +7031,7 @@
                 </a:solidFill>
                 <a:latin typeface="Nunito Sans"/>
               </a:rPr>
-              <a:t>Un rasgo bueno lo ilumina todo: «es guapo, será listo»</a:t>
+              <a:t>一个好的特点照亮了一切：“他长得帅，一定聪明”</a:t>
             </a:r>
           </a:p>
           <a:p>
@@ -7056,7 +7056,7 @@
                 </a:solidFill>
                 <a:latin typeface="Nunito Sans"/>
               </a:rPr>
-              <a:t>Al revés también: un rasgo malo lo oscurece todo</a:t>
+              <a:t>反过来也一样：一个坏的特点让一切变暗</a:t>
             </a:r>
           </a:p>
           <a:p>
@@ -7081,7 +7081,7 @@
                 </a:solidFill>
                 <a:latin typeface="Nunito Sans"/>
               </a:rPr>
-              <a:t>Lo describió el psicólogo Edward Thorndike en 1920</a:t>
+              <a:t>这是心理学家爱德华·桑代克（Edward Thorndike）在1920年描述的</a:t>
             </a:r>
           </a:p>
         </p:txBody>
@@ -7272,7 +7272,7 @@
                 </a:solidFill>
                 <a:latin typeface="Nunito Sans"/>
               </a:rPr>
-              <a:t>Basta ver una cara un instante para juzgar si parece de fiar</a:t>
+              <a:t>看一张脸一下，就能判断他看起来可不可信</a:t>
             </a:r>
           </a:p>
           <a:p>
@@ -7297,7 +7297,7 @@
                 </a:solidFill>
                 <a:latin typeface="Nunito Sans"/>
               </a:rPr>
-              <a:t>Esa primera idea suele costar cambiarla</a:t>
+              <a:t>这第一个想法往往很难改变</a:t>
             </a:r>
           </a:p>
           <a:p>
@@ -7322,7 +7322,7 @@
                 </a:solidFill>
                 <a:latin typeface="Nunito Sans"/>
               </a:rPr>
-              <a:t>Luego buscamos pruebas que la confirmen （第44课）</a:t>
+              <a:t>后来我们会去找证据来证实它（第44课）</a:t>
             </a:r>
           </a:p>
           <a:p>
@@ -7347,7 +7347,7 @@
                 </a:solidFill>
                 <a:latin typeface="Nunito Sans"/>
               </a:rPr>
-              <a:t>Pero una cara o una ropa dicen muy poco de cómo es alguien</a:t>
+              <a:t>但是一张脸或一身衣服，对一个人是什么样的，说明的很少</a:t>
             </a:r>
           </a:p>
         </p:txBody>

--- a/curso/pptx/S45.pptx
+++ b/curso/pptx/S45.pptx
@@ -4746,7 +4746,7 @@
                 </a:solidFill>
                 <a:latin typeface="Nunito Sans"/>
               </a:rPr>
-              <a:t>第一天，Aitor没有跟任何人打招呼。有些人就断定：“他是个冷冰冰的人。”其实他是紧张。</a:t>
+              <a:t>第一天，一个男孩没有跟任何人打招呼。有些人就断定：“他是个冷冰冰的人。”其实他是紧张。</a:t>
             </a:r>
           </a:p>
         </p:txBody>
@@ -4819,7 +4819,7 @@
                 </a:solidFill>
                 <a:latin typeface="Nunito Sans"/>
               </a:rPr>
-              <a:t>后来，Aitor做的每件事看起来都在证实它（第44课）。</a:t>
+              <a:t>后来，这个男孩做的每件事看起来都在证实它（第44课）。</a:t>
             </a:r>
           </a:p>
           <a:p>
@@ -5055,7 +5055,7 @@
                 </a:solidFill>
                 <a:latin typeface="Nunito Sans"/>
               </a:rPr>
-              <a:t>为课间足球队选人，Leire先选了Aitor。她看到他每个星期都进很多球。</a:t>
+              <a:t>为课间足球队选人，一个女孩先选了一个男孩。她看到他每个星期都进很多球。</a:t>
             </a:r>
           </a:p>
         </p:txBody>
